--- a/生成的课件/08_管理经济学_第08章_长期投资决策与资本预算.pptx
+++ b/生成的课件/08_管理经济学_第08章_长期投资决策与资本预算.pptx
@@ -4353,7 +4353,7 @@
                 <a:latin typeface="Times New Roman"/>
                 <a:ea typeface="宋体"/>
               </a:rPr>
-              <a:t>  1. 债务成本与股权资本成本（CAPM 模型）</a:t>
+              <a:t>1. 债务成本与股权资本成本（CAPM 模型）</a:t>
             </a:r>
           </a:p>
         </p:txBody>
@@ -4396,7 +4396,7 @@
                 <a:latin typeface="Times New Roman"/>
                 <a:ea typeface="宋体"/>
               </a:rPr>
-              <a:t>（1）税后债务资金成本： </a:t>
+              <a:t>（1）税后债务资金成本：</a:t>
             </a:r>
             <a:r>
               <a:rPr sz="1150" b="0">
@@ -4406,7 +4406,7 @@
                 <a:latin typeface="Times New Roman"/>
                 <a:ea typeface="宋体"/>
               </a:rPr>
-              <a:t>K_d = i(1 - T) \quad (i 为借款或债券利率，利息税前扣除享受税盾)</a:t>
+              <a:t>Kd = i(1 - T) (i 为借款或债券利率，利息税前扣除享受税盾)</a:t>
             </a:r>
           </a:p>
           <a:p>
@@ -4426,7 +4426,7 @@
                 <a:latin typeface="Times New Roman"/>
                 <a:ea typeface="宋体"/>
               </a:rPr>
-              <a:t>（2）股权资本资产定价模型（CAPM）： </a:t>
+              <a:t>（2）股权资本资产定价模型（CAPM）：</a:t>
             </a:r>
             <a:r>
               <a:rPr sz="1150" b="0">
@@ -4436,7 +4436,7 @@
                 <a:latin typeface="Times New Roman"/>
                 <a:ea typeface="宋体"/>
               </a:rPr>
-              <a:t>K_e = R_f + \beta (R_m - R_f)</a:t>
+              <a:t>Ke = Rf + β (Rm - Rf)</a:t>
             </a:r>
           </a:p>
           <a:p>
@@ -4456,7 +4456,7 @@
                 <a:latin typeface="Times New Roman"/>
                 <a:ea typeface="宋体"/>
               </a:rPr>
-              <a:t>   • 无风险收益率 R_f： </a:t>
+              <a:t>• 无风险收益率 Rf：</a:t>
             </a:r>
             <a:r>
               <a:rPr sz="1150" b="0">
@@ -4486,7 +4486,7 @@
                 <a:latin typeface="Times New Roman"/>
                 <a:ea typeface="宋体"/>
               </a:rPr>
-              <a:t>   • 贝塔系数 \beta： </a:t>
+              <a:t>• 贝塔系数 β：</a:t>
             </a:r>
             <a:r>
               <a:rPr sz="1150" b="0">
@@ -4496,7 +4496,7 @@
                 <a:latin typeface="Times New Roman"/>
                 <a:ea typeface="宋体"/>
               </a:rPr>
-              <a:t>测度企业股价相对全市场波动的系统性风险弹性（\beta &gt; 1 高风险，\beta &lt; 1 稳健）。</a:t>
+              <a:t>测度企业股价相对全市场波动的系统性风险弹性（β &gt; 1 高风险，β &lt; 1 稳健）。</a:t>
             </a:r>
           </a:p>
           <a:p>
@@ -4516,7 +4516,7 @@
                 <a:latin typeface="Times New Roman"/>
                 <a:ea typeface="宋体"/>
               </a:rPr>
-              <a:t>   • 市场风险溢价 (R_m - R_f)： </a:t>
+              <a:t>• 市场风险溢价 (Rm - Rf)：</a:t>
             </a:r>
             <a:r>
               <a:rPr sz="1150" b="0">
@@ -4626,7 +4626,7 @@
                 <a:latin typeface="Times New Roman"/>
                 <a:ea typeface="宋体"/>
               </a:rPr>
-              <a:t>  2. 加权平均资金成本（WACC）计算</a:t>
+              <a:t>2. 加权平均资金成本（WACC）计算</a:t>
             </a:r>
           </a:p>
         </p:txBody>
@@ -4669,7 +4669,7 @@
                 <a:latin typeface="Times New Roman"/>
                 <a:ea typeface="宋体"/>
               </a:rPr>
-              <a:t>（1）WACC 综合公式： </a:t>
+              <a:t>（1）WACC 综合公式：</a:t>
             </a:r>
             <a:r>
               <a:rPr sz="1250" b="0">
@@ -4679,7 +4679,7 @@
                 <a:latin typeface="Times New Roman"/>
                 <a:ea typeface="宋体"/>
               </a:rPr>
-              <a:t>WACC = \frac{D}{D + E} K_d(1 - T) + \frac{E}{D + E} K_e \quad (D: 负债总额, E: 权益市值)</a:t>
+              <a:t>WACC = (D) / (D + E) Kd(1 - T) + (E) / (D + E) Ke (D: 负债总额, E: 权益市值)</a:t>
             </a:r>
           </a:p>
           <a:p>
@@ -4699,7 +4699,7 @@
                 <a:latin typeface="Times New Roman"/>
                 <a:ea typeface="宋体"/>
               </a:rPr>
-              <a:t>（2）基准折现率功能： </a:t>
+              <a:t>（2）基准折现率功能：</a:t>
             </a:r>
             <a:r>
               <a:rPr sz="1250" b="0">
@@ -4729,7 +4729,7 @@
                 <a:latin typeface="Times New Roman"/>
                 <a:ea typeface="宋体"/>
               </a:rPr>
-              <a:t>（3）例8-10 算例： </a:t>
+              <a:t>（3）例8-10 算例：</a:t>
             </a:r>
             <a:r>
               <a:rPr sz="1250" b="0">
@@ -4739,7 +4739,7 @@
                 <a:latin typeface="Times New Roman"/>
                 <a:ea typeface="宋体"/>
               </a:rPr>
-              <a:t>负债占比 40\% (利率6\%, 税率25\%)，权益占比 60\% (CAPM求得Ke=12\%) \implies WACC = 0.4 \times 6\%(1-0.25) + 0.6 \times 12\% = 1.8\% + 7.2\% = 9.0\%。</a:t>
+              <a:t>负债占比 40% (利率6%, 税率25%)，权益占比 60% (CAPM求得Ke=12%) ⇒ WACC = 0.4 × 6%(1-0.25) + 0.6 × 12% = 1.8% + 7.2% = 9.0%。</a:t>
             </a:r>
           </a:p>
         </p:txBody>
@@ -4796,7 +4796,7 @@
                 <a:latin typeface="Times New Roman"/>
                 <a:ea typeface="宋体"/>
               </a:rPr>
-              <a:t>  ★ 核心要点：WACC 是资本市场对企业资产风险定价的基准要求，唯有投资回报率跑赢 WACC 才能为股东创造真正价值。</a:t>
+              <a:t>★ 核心要点：WACC 是资本市场对企业资产风险定价的基准要求，唯有投资回报率跑赢 WACC 才能为股东创造真正价值。</a:t>
             </a:r>
           </a:p>
         </p:txBody>
@@ -5510,7 +5510,7 @@
                 <a:latin typeface="Times New Roman"/>
                 <a:ea typeface="宋体"/>
               </a:rPr>
-              <a:t>  1. 传统静态返本期法（Payback Period）</a:t>
+              <a:t>1. 传统静态返本期法（Payback Period）</a:t>
             </a:r>
           </a:p>
         </p:txBody>
@@ -5553,7 +5553,7 @@
                 <a:latin typeface="Times New Roman"/>
                 <a:ea typeface="宋体"/>
               </a:rPr>
-              <a:t>（1）计算方法： </a:t>
+              <a:t>（1）计算方法：</a:t>
             </a:r>
             <a:r>
               <a:rPr sz="1250" b="0">
@@ -5563,7 +5563,7 @@
                 <a:latin typeface="Times New Roman"/>
                 <a:ea typeface="宋体"/>
               </a:rPr>
-              <a:t>收回项目初始投资所需的时间年限（当各年 NCF 相等时，PP = C_0 / NCF）。</a:t>
+              <a:t>收回项目初始投资所需的时间年限（当各年 NCF 相等时，PP = C₀ / NCF）。</a:t>
             </a:r>
           </a:p>
           <a:p>
@@ -5583,7 +5583,7 @@
                 <a:latin typeface="Times New Roman"/>
                 <a:ea typeface="宋体"/>
               </a:rPr>
-              <a:t>（2）决策准则： </a:t>
+              <a:t>（2）决策准则：</a:t>
             </a:r>
             <a:r>
               <a:rPr sz="1250" b="0">
@@ -5613,7 +5613,7 @@
                 <a:latin typeface="Times New Roman"/>
                 <a:ea typeface="宋体"/>
               </a:rPr>
-              <a:t>（3）优点与致命缺陷： </a:t>
+              <a:t>（3）优点与致命缺陷：</a:t>
             </a:r>
             <a:r>
               <a:rPr sz="1250" b="0">
@@ -5723,7 +5723,7 @@
                 <a:latin typeface="Times New Roman"/>
                 <a:ea typeface="宋体"/>
               </a:rPr>
-              <a:t>  2. 动态折现返本期法（Discounted Payback Period）</a:t>
+              <a:t>2. 动态折现返本期法（Discounted Payback Period）</a:t>
             </a:r>
           </a:p>
         </p:txBody>
@@ -5766,7 +5766,7 @@
                 <a:latin typeface="Times New Roman"/>
                 <a:ea typeface="宋体"/>
               </a:rPr>
-              <a:t>（1）计算方法： </a:t>
+              <a:t>（1）计算方法：</a:t>
             </a:r>
             <a:r>
               <a:rPr sz="1250" b="0">
@@ -5796,7 +5796,7 @@
                 <a:latin typeface="Times New Roman"/>
                 <a:ea typeface="宋体"/>
               </a:rPr>
-              <a:t>（2）管理评价： </a:t>
+              <a:t>（2）管理评价：</a:t>
             </a:r>
             <a:r>
               <a:rPr sz="1250" b="0">
@@ -5863,7 +5863,7 @@
                 <a:latin typeface="Times New Roman"/>
                 <a:ea typeface="宋体"/>
               </a:rPr>
-              <a:t>  ★ 核心要点：返本期法是评估项目流动性风险与抗不可抗力周期的辅助指标，不能作为最终价值决策的唯一依据。</a:t>
+              <a:t>★ 核心要点：返本期法是评估项目流动性风险与抗不可抗力周期的辅助指标，不能作为最终价值决策的唯一依据。</a:t>
             </a:r>
           </a:p>
         </p:txBody>
@@ -6294,7 +6294,7 @@
                 <a:latin typeface="Times New Roman"/>
                 <a:ea typeface="宋体"/>
               </a:rPr>
-              <a:t>  评价指标判定准则与冲突仲裁</a:t>
+              <a:t>评价指标判定准则与冲突仲裁</a:t>
             </a:r>
           </a:p>
         </p:txBody>
@@ -6337,7 +6337,7 @@
                 <a:latin typeface="Times New Roman"/>
                 <a:ea typeface="宋体"/>
               </a:rPr>
-              <a:t>（1）净现值法 (NPV, Net Present Value)： </a:t>
+              <a:t>（1）净现值法 (NPV, Net Present Value)：</a:t>
             </a:r>
             <a:r>
               <a:rPr sz="1200" b="0">
@@ -6347,7 +6347,7 @@
                 <a:latin typeface="Times New Roman"/>
                 <a:ea typeface="宋体"/>
               </a:rPr>
-              <a:t>NPV = \sum_{t=1}^n \frac{NCF_t}{(1+r)^t} - C_0。NPV \ge 0 方案可行。衡量财富净增加额绝对值。</a:t>
+              <a:t>NPV = ∑ⁿ (NCFₜ) / ((1+r)ᵗ) - C₀。NPV ≥ 0 方案可行。衡量财富净增加额绝对值。</a:t>
             </a:r>
           </a:p>
           <a:p>
@@ -6367,7 +6367,7 @@
                 <a:latin typeface="Times New Roman"/>
                 <a:ea typeface="宋体"/>
               </a:rPr>
-              <a:t>（2）内部回报率 (IRR, Internal Rate of Return)： </a:t>
+              <a:t>（2）内部回报率 (IRR, Internal Rate of Return)：</a:t>
             </a:r>
             <a:r>
               <a:rPr sz="1200" b="0">
@@ -6377,7 +6377,7 @@
                 <a:latin typeface="Times New Roman"/>
                 <a:ea typeface="宋体"/>
               </a:rPr>
-              <a:t>使 NPV 恰好等于 0 时的内在贴现率 r^*。IRR \ge WACC 方案可行。</a:t>
+              <a:t>使 NPV 恰好等于 0 时的内在贴现率 r*。IRR ≥ WACC 方案可行。</a:t>
             </a:r>
           </a:p>
           <a:p>
@@ -6397,7 +6397,7 @@
                 <a:latin typeface="Times New Roman"/>
                 <a:ea typeface="宋体"/>
               </a:rPr>
-              <a:t>（3）两指标冲突场景（互斥项目）： </a:t>
+              <a:t>（3）两指标冲突场景（互斥项目）：</a:t>
             </a:r>
             <a:r>
               <a:rPr sz="1200" b="0">
@@ -6427,7 +6427,7 @@
                 <a:latin typeface="Times New Roman"/>
                 <a:ea typeface="宋体"/>
               </a:rPr>
-              <a:t>（4）NPV 终极仲裁法则： </a:t>
+              <a:t>（4）NPV 终极仲裁法则：</a:t>
             </a:r>
             <a:r>
               <a:rPr sz="1200" b="0">
@@ -6494,7 +6494,7 @@
                 <a:latin typeface="Times New Roman"/>
                 <a:ea typeface="宋体"/>
               </a:rPr>
-              <a:t>  ★ 理论精要：净现值 NPV 法则是现代企业金融理论不可动摇的最高准绳。</a:t>
+              <a:t>★ 理论精要：净现值 NPV 法则是现代企业金融理论不可动摇的最高准绳。</a:t>
             </a:r>
           </a:p>
         </p:txBody>
@@ -6901,7 +6901,7 @@
                 <a:latin typeface="Times New Roman"/>
                 <a:ea typeface="宋体"/>
               </a:rPr>
-              <a:t>  1. 传统 IRR 的再投资收益率缺陷</a:t>
+              <a:t>1. 传统 IRR 的再投资收益率缺陷</a:t>
             </a:r>
           </a:p>
         </p:txBody>
@@ -6944,7 +6944,7 @@
                 <a:latin typeface="Times New Roman"/>
                 <a:ea typeface="宋体"/>
               </a:rPr>
-              <a:t>（1）内在理论缺陷： </a:t>
+              <a:t>（1）内在理论缺陷：</a:t>
             </a:r>
             <a:r>
               <a:rPr sz="1250" b="0">
@@ -6974,7 +6974,7 @@
                 <a:latin typeface="Times New Roman"/>
                 <a:ea typeface="宋体"/>
               </a:rPr>
-              <a:t>（2）现实脱节： </a:t>
+              <a:t>（2）现实脱节：</a:t>
             </a:r>
             <a:r>
               <a:rPr sz="1250" b="0">
@@ -7084,7 +7084,7 @@
                 <a:latin typeface="Times New Roman"/>
                 <a:ea typeface="宋体"/>
               </a:rPr>
-              <a:t>  2. 修正内部收益率（MIRR）计算与修正</a:t>
+              <a:t>2. 修正内部收益率（MIRR）计算与修正</a:t>
             </a:r>
           </a:p>
         </p:txBody>
@@ -7127,7 +7127,7 @@
                 <a:latin typeface="Times New Roman"/>
                 <a:ea typeface="宋体"/>
               </a:rPr>
-              <a:t>（1）计算逻辑： </a:t>
+              <a:t>（1）计算逻辑：</a:t>
             </a:r>
             <a:r>
               <a:rPr sz="1250" b="0">
@@ -7157,7 +7157,7 @@
                 <a:latin typeface="Times New Roman"/>
                 <a:ea typeface="宋体"/>
               </a:rPr>
-              <a:t>（2）公式： </a:t>
+              <a:t>（2）公式：</a:t>
             </a:r>
             <a:r>
               <a:rPr sz="1250" b="0">
@@ -7167,7 +7167,7 @@
                 <a:latin typeface="Times New Roman"/>
                 <a:ea typeface="宋体"/>
               </a:rPr>
-              <a:t>C_0 = \frac{FV_{\text{以WACC再投资}}}{(1 + MIRR)^n} \implies MIRR = \left( \frac{FV}{C_0} \right)^{1/n} - 1</a:t>
+              <a:t>C₀ = (FV_以WACC再投资) / ((1 + MIRR)ⁿ) ⇒ MIRR = ((FV) / (C₀))^1/n - 1</a:t>
             </a:r>
           </a:p>
           <a:p>
@@ -7187,7 +7187,7 @@
                 <a:latin typeface="Times New Roman"/>
                 <a:ea typeface="宋体"/>
               </a:rPr>
-              <a:t>（3）管理价值： </a:t>
+              <a:t>（3）管理价值：</a:t>
             </a:r>
             <a:r>
               <a:rPr sz="1250" b="0">
@@ -7254,7 +7254,7 @@
                 <a:latin typeface="Times New Roman"/>
                 <a:ea typeface="宋体"/>
               </a:rPr>
-              <a:t>  ★ 核心要点：MIRR 修正了传统 IRR 的理论缺陷，为高波动性长期项目提供了更真实的内在回报率刻度。</a:t>
+              <a:t>★ 核心要点：MIRR 修正了传统 IRR 的理论缺陷，为高波动性长期项目提供了更真实的内在回报率刻度。</a:t>
             </a:r>
           </a:p>
         </p:txBody>
@@ -9195,7 +9195,7 @@
                 <a:latin typeface="Times New Roman"/>
                 <a:ea typeface="宋体"/>
               </a:rPr>
-              <a:t>  1. 获利指数（Profitability Index, PI）公式</a:t>
+              <a:t>1. 获利指数（Profitability Index, PI）公式</a:t>
             </a:r>
           </a:p>
         </p:txBody>
@@ -9238,7 +9238,7 @@
                 <a:latin typeface="Times New Roman"/>
                 <a:ea typeface="宋体"/>
               </a:rPr>
-              <a:t>（1）计算公式： </a:t>
+              <a:t>（1）计算公式：</a:t>
             </a:r>
             <a:r>
               <a:rPr sz="1250" b="0">
@@ -9248,7 +9248,7 @@
                 <a:latin typeface="Times New Roman"/>
                 <a:ea typeface="宋体"/>
               </a:rPr>
-              <a:t>PI = \frac{\text{未来现金流入总现值}}{\text{初始投资额 C_0}} = \frac{NPV + C_0}{C_0}</a:t>
+              <a:t>PI = (未来现金流入总现值) / (初始投资额 C₀) = (NPV + C₀) / (C₀)</a:t>
             </a:r>
           </a:p>
           <a:p>
@@ -9268,7 +9268,7 @@
                 <a:latin typeface="Times New Roman"/>
                 <a:ea typeface="宋体"/>
               </a:rPr>
-              <a:t>（2）经济含义： </a:t>
+              <a:t>（2）经济含义：</a:t>
             </a:r>
             <a:r>
               <a:rPr sz="1250" b="0">
@@ -9278,7 +9278,7 @@
                 <a:latin typeface="Times New Roman"/>
                 <a:ea typeface="宋体"/>
               </a:rPr>
-              <a:t>反映每投入 1 元初始资本所能创造的现金流入现值回报效率（PI \ge 1.0 项目可行）。</a:t>
+              <a:t>反映每投入 1 元初始资本所能创造的现金流入现值回报效率（PI ≥ 1.0 项目可行）。</a:t>
             </a:r>
           </a:p>
         </p:txBody>
@@ -9378,7 +9378,7 @@
                 <a:latin typeface="Times New Roman"/>
                 <a:ea typeface="宋体"/>
               </a:rPr>
-              <a:t>  2. 资本限额（Capital Rationing）下的最优投资组合（例8-14）</a:t>
+              <a:t>2. 资本限额（Capital Rationing）下的最优投资组合（例8-14）</a:t>
             </a:r>
           </a:p>
         </p:txBody>
@@ -9421,7 +9421,7 @@
                 <a:latin typeface="Times New Roman"/>
                 <a:ea typeface="宋体"/>
               </a:rPr>
-              <a:t>（1）预算硬约束场景： </a:t>
+              <a:t>（1）预算硬约束场景：</a:t>
             </a:r>
             <a:r>
               <a:rPr sz="1250" b="0">
@@ -9451,7 +9451,7 @@
                 <a:latin typeface="Times New Roman"/>
                 <a:ea typeface="宋体"/>
               </a:rPr>
-              <a:t>（2）错误做法： </a:t>
+              <a:t>（2）错误做法：</a:t>
             </a:r>
             <a:r>
               <a:rPr sz="1250" b="0">
@@ -9481,7 +9481,7 @@
                 <a:latin typeface="Times New Roman"/>
                 <a:ea typeface="宋体"/>
               </a:rPr>
-              <a:t>（3）科学优选法则： </a:t>
+              <a:t>（3）科学优选法则：</a:t>
             </a:r>
             <a:r>
               <a:rPr sz="1250" b="0">
@@ -9548,7 +9548,7 @@
                 <a:latin typeface="Times New Roman"/>
                 <a:ea typeface="宋体"/>
               </a:rPr>
-              <a:t>  ★ 核心要点：获利指数 PI 是企业在资金预算硬约束下优化多项目资本配置的黄金利器。</a:t>
+              <a:t>★ 核心要点：获利指数 PI 是企业在资金预算硬约束下优化多项目资本配置的黄金利器。</a:t>
             </a:r>
           </a:p>
         </p:txBody>
@@ -9955,7 +9955,7 @@
                 <a:latin typeface="Times New Roman"/>
                 <a:ea typeface="宋体"/>
               </a:rPr>
-              <a:t>  1. 寿命不同投资方案的等额年金法（EAA，例8-15）</a:t>
+              <a:t>1. 寿命不同投资方案的等额年金法（EAA，例8-15）</a:t>
             </a:r>
           </a:p>
         </p:txBody>
@@ -9998,7 +9998,7 @@
                 <a:latin typeface="Times New Roman"/>
                 <a:ea typeface="宋体"/>
               </a:rPr>
-              <a:t>（1）决策冲突： </a:t>
+              <a:t>（1）决策冲突：</a:t>
             </a:r>
             <a:r>
               <a:rPr sz="1250" b="0">
@@ -10028,7 +10028,7 @@
                 <a:latin typeface="Times New Roman"/>
                 <a:ea typeface="宋体"/>
               </a:rPr>
-              <a:t>（2）等额年金法公式： </a:t>
+              <a:t>（2）等额年金法公式：</a:t>
             </a:r>
             <a:r>
               <a:rPr sz="1250" b="0">
@@ -10038,7 +10038,7 @@
                 <a:latin typeface="Times New Roman"/>
                 <a:ea typeface="宋体"/>
               </a:rPr>
-              <a:t>EAA = \frac{NPV}{PVIFA_{r, n}}（将全生命周期 NPV 转化为每年等额创造的年金净现值）。</a:t>
+              <a:t>EAA = (NPV) / (PVIFA(r, n))（将全生命周期 NPV 转化为每年等额创造的年金净现值）。</a:t>
             </a:r>
           </a:p>
           <a:p>
@@ -10058,7 +10058,7 @@
                 <a:latin typeface="Times New Roman"/>
                 <a:ea typeface="宋体"/>
               </a:rPr>
-              <a:t>（3）决策准则： </a:t>
+              <a:t>（3）决策准则：</a:t>
             </a:r>
             <a:r>
               <a:rPr sz="1250" b="0">
@@ -10168,7 +10168,7 @@
                 <a:latin typeface="Times New Roman"/>
                 <a:ea typeface="宋体"/>
               </a:rPr>
-              <a:t>  2. 设备更新差量分析法与案例8-1海尔休克鱼</a:t>
+              <a:t>2. 设备更新差量分析法与案例8-1海尔休克鱼</a:t>
             </a:r>
           </a:p>
         </p:txBody>
@@ -10211,7 +10211,7 @@
                 <a:latin typeface="Times New Roman"/>
                 <a:ea typeface="宋体"/>
               </a:rPr>
-              <a:t>（1）设备更新差量分析（例8-16）： </a:t>
+              <a:t>（1）设备更新差量分析（例8-16）：</a:t>
             </a:r>
             <a:r>
               <a:rPr sz="1250" b="0">
@@ -10241,7 +10241,7 @@
                 <a:latin typeface="Times New Roman"/>
                 <a:ea typeface="宋体"/>
               </a:rPr>
-              <a:t>（2）案例8-1 启示： </a:t>
+              <a:t>（2）案例8-1 启示：</a:t>
             </a:r>
             <a:r>
               <a:rPr sz="1250" b="0">
@@ -10308,7 +10308,7 @@
                 <a:latin typeface="Times New Roman"/>
                 <a:ea typeface="宋体"/>
               </a:rPr>
-              <a:t>  ★ 核心要点：资本预算的实战精髓在于灵活应对资金额度约束、设备寿命周期差异与现有资产置换更迭。</a:t>
+              <a:t>★ 核心要点：资本预算的实战精髓在于灵活应对资金额度约束、设备寿命周期差异与现有资产置换更迭。</a:t>
             </a:r>
           </a:p>
         </p:txBody>
@@ -12310,7 +12310,7 @@
                 <a:latin typeface="Times New Roman"/>
                 <a:ea typeface="宋体"/>
               </a:rPr>
-              <a:t>  1. 通货膨胀下的名义现金流 vs 实际现金流匹配</a:t>
+              <a:t>1. 通货膨胀下的名义现金流 vs 实际现金流匹配</a:t>
             </a:r>
           </a:p>
         </p:txBody>
@@ -12353,7 +12353,7 @@
                 <a:latin typeface="Times New Roman"/>
                 <a:ea typeface="宋体"/>
               </a:rPr>
-              <a:t>（1）一致性匹配原则： </a:t>
+              <a:t>（1）一致性匹配原则：</a:t>
             </a:r>
             <a:r>
               <a:rPr sz="1250" b="0">
@@ -12383,7 +12383,7 @@
                 <a:latin typeface="Times New Roman"/>
                 <a:ea typeface="宋体"/>
               </a:rPr>
-              <a:t>（2）费雪效应方程式： </a:t>
+              <a:t>（2）费雪效应方程式：</a:t>
             </a:r>
             <a:r>
               <a:rPr sz="1250" b="0">
@@ -12393,7 +12393,7 @@
                 <a:latin typeface="Times New Roman"/>
                 <a:ea typeface="宋体"/>
               </a:rPr>
-              <a:t>1 + r_{\text{名义}} = (1 + r_{\text{实际}})(1 + i_{\text{通胀}}) \implies r_{\text{名义}} \approx r_{\text{实际}} + i</a:t>
+              <a:t>1 + r_名义 = (1 + r_实际)(1 + i_通胀) ⇒ r_名义 ≈ r_实际 + i</a:t>
             </a:r>
           </a:p>
           <a:p>
@@ -12413,7 +12413,7 @@
                 <a:latin typeface="Times New Roman"/>
                 <a:ea typeface="宋体"/>
               </a:rPr>
-              <a:t>（3）通胀对折旧抵税的侵蚀： </a:t>
+              <a:t>（3）通胀对折旧抵税的侵蚀：</a:t>
             </a:r>
             <a:r>
               <a:rPr sz="1250" b="0">
@@ -12523,7 +12523,7 @@
                 <a:latin typeface="Times New Roman"/>
                 <a:ea typeface="宋体"/>
               </a:rPr>
-              <a:t>  2. 加速折旧法（双倍余额递减法）的税收时间价值</a:t>
+              <a:t>2. 加速折旧法（双倍余额递减法）的税收时间价值</a:t>
             </a:r>
           </a:p>
         </p:txBody>
@@ -12566,7 +12566,7 @@
                 <a:latin typeface="Times New Roman"/>
                 <a:ea typeface="宋体"/>
               </a:rPr>
-              <a:t>（1）前重后轻税收筹划： </a:t>
+              <a:t>（1）前重后轻税收筹划：</a:t>
             </a:r>
             <a:r>
               <a:rPr sz="1250" b="0">
@@ -12596,7 +12596,7 @@
                 <a:latin typeface="Times New Roman"/>
                 <a:ea typeface="宋体"/>
               </a:rPr>
-              <a:t>（2）NPV 增量效应： </a:t>
+              <a:t>（2）NPV 增量效应：</a:t>
             </a:r>
             <a:r>
               <a:rPr sz="1250" b="0">
@@ -12663,7 +12663,7 @@
                 <a:latin typeface="Times New Roman"/>
                 <a:ea typeface="宋体"/>
               </a:rPr>
-              <a:t>  ★ 核心要点：将通货膨胀与加速折旧税盾纳入考量，使长期投资资本预算更趋于真实严密。</a:t>
+              <a:t>★ 核心要点：将通货膨胀与加速折旧税盾纳入考量，使长期投资资本预算更趋于真实严密。</a:t>
             </a:r>
           </a:p>
         </p:txBody>
@@ -13070,7 +13070,7 @@
                 <a:latin typeface="Times New Roman"/>
                 <a:ea typeface="宋体"/>
               </a:rPr>
-              <a:t>  现金流量科学估计</a:t>
+              <a:t>现金流量科学估计</a:t>
             </a:r>
           </a:p>
         </p:txBody>
@@ -13274,7 +13274,7 @@
                 <a:latin typeface="Times New Roman"/>
                 <a:ea typeface="宋体"/>
               </a:rPr>
-              <a:t>  综合资金成本 WACC</a:t>
+              <a:t>综合资金成本 WACC</a:t>
             </a:r>
           </a:p>
         </p:txBody>
@@ -13478,7 +13478,7 @@
                 <a:latin typeface="Times New Roman"/>
                 <a:ea typeface="宋体"/>
               </a:rPr>
-              <a:t>  投资方案评价体系</a:t>
+              <a:t>投资方案评价体系</a:t>
             </a:r>
           </a:p>
         </p:txBody>
@@ -13682,7 +13682,7 @@
                 <a:latin typeface="Times New Roman"/>
                 <a:ea typeface="宋体"/>
               </a:rPr>
-              <a:t>  资本预算实战应用</a:t>
+              <a:t>资本预算实战应用</a:t>
             </a:r>
           </a:p>
         </p:txBody>
@@ -13843,7 +13843,7 @@
                 <a:latin typeface="Times New Roman"/>
                 <a:ea typeface="宋体"/>
               </a:rPr>
-              <a:t>  ★ 战略结语：资本预算是企业最重大的战略赌注，依靠严谨的现金流贴现与风险加权成本，彻底杜绝盲目投资与资本毁灭。</a:t>
+              <a:t>★ 战略结语：资本预算是企业最重大的战略赌注，依靠严谨的现金流贴现与风险加权成本，彻底杜绝盲目投资与资本毁灭。</a:t>
             </a:r>
           </a:p>
         </p:txBody>
@@ -14250,7 +14250,7 @@
                 <a:latin typeface="Times New Roman"/>
                 <a:ea typeface="宋体"/>
               </a:rPr>
-              <a:t>  课后复习思考题与 MBA 讨论案例（严格对应课本习题）</a:t>
+              <a:t>课后复习思考题与 MBA 讨论案例（严格对应课本习题）</a:t>
             </a:r>
           </a:p>
         </p:txBody>
@@ -14293,7 +14293,7 @@
                 <a:latin typeface="Times New Roman"/>
                 <a:ea typeface="宋体"/>
               </a:rPr>
-              <a:t>1. </a:t>
+              <a:t>1.</a:t>
             </a:r>
             <a:r>
               <a:rPr sz="1150" b="0">
@@ -14323,7 +14323,7 @@
                 <a:latin typeface="Times New Roman"/>
                 <a:ea typeface="宋体"/>
               </a:rPr>
-              <a:t>2. </a:t>
+              <a:t>2.</a:t>
             </a:r>
             <a:r>
               <a:rPr sz="1150" b="0">
@@ -14353,7 +14353,7 @@
                 <a:latin typeface="Times New Roman"/>
                 <a:ea typeface="宋体"/>
               </a:rPr>
-              <a:t>3. </a:t>
+              <a:t>3.</a:t>
             </a:r>
             <a:r>
               <a:rPr sz="1150" b="0">
@@ -14383,7 +14383,7 @@
                 <a:latin typeface="Times New Roman"/>
                 <a:ea typeface="宋体"/>
               </a:rPr>
-              <a:t>4. </a:t>
+              <a:t>4.</a:t>
             </a:r>
             <a:r>
               <a:rPr sz="1150" b="0">
@@ -14413,7 +14413,7 @@
                 <a:latin typeface="Times New Roman"/>
                 <a:ea typeface="宋体"/>
               </a:rPr>
-              <a:t>5. </a:t>
+              <a:t>5.</a:t>
             </a:r>
             <a:r>
               <a:rPr sz="1150" b="0">
@@ -14443,7 +14443,7 @@
                 <a:latin typeface="Times New Roman"/>
                 <a:ea typeface="宋体"/>
               </a:rPr>
-              <a:t>6. </a:t>
+              <a:t>6.</a:t>
             </a:r>
             <a:r>
               <a:rPr sz="1150" b="0">
@@ -14473,7 +14473,7 @@
                 <a:latin typeface="Times New Roman"/>
                 <a:ea typeface="宋体"/>
               </a:rPr>
-              <a:t>7. </a:t>
+              <a:t>7.</a:t>
             </a:r>
             <a:r>
               <a:rPr sz="1150" b="0">
@@ -15197,7 +15197,7 @@
                 <a:latin typeface="Times New Roman"/>
                 <a:ea typeface="宋体"/>
               </a:rPr>
-              <a:t>  1. 长期投资决策（资本预算）的本质特征</a:t>
+              <a:t>1. 长期投资决策（资本预算）的本质特征</a:t>
             </a:r>
           </a:p>
         </p:txBody>
@@ -15240,7 +15240,7 @@
                 <a:latin typeface="Times New Roman"/>
                 <a:ea typeface="宋体"/>
               </a:rPr>
-              <a:t>（1）概念界定： </a:t>
+              <a:t>（1）概念界定：</a:t>
             </a:r>
             <a:r>
               <a:rPr sz="1250" b="0">
@@ -15270,7 +15270,7 @@
                 <a:latin typeface="Times New Roman"/>
                 <a:ea typeface="宋体"/>
               </a:rPr>
-              <a:t>（2）核心特征： </a:t>
+              <a:t>（2）核心特征：</a:t>
             </a:r>
             <a:r>
               <a:rPr sz="1250" b="0">
@@ -15380,7 +15380,7 @@
                 <a:latin typeface="Times New Roman"/>
                 <a:ea typeface="宋体"/>
               </a:rPr>
-              <a:t>  2. 投资决策四阶段标准化工作闭环</a:t>
+              <a:t>2. 投资决策四阶段标准化工作闭环</a:t>
             </a:r>
           </a:p>
         </p:txBody>
@@ -15423,7 +15423,7 @@
                 <a:latin typeface="Times New Roman"/>
                 <a:ea typeface="宋体"/>
               </a:rPr>
-              <a:t>（1）阶段一（方案提出与筛选）： </a:t>
+              <a:t>（1）阶段一（方案提出与筛选）：</a:t>
             </a:r>
             <a:r>
               <a:rPr sz="1250" b="0">
@@ -15453,7 +15453,7 @@
                 <a:latin typeface="Times New Roman"/>
                 <a:ea typeface="宋体"/>
               </a:rPr>
-              <a:t>（2）阶段二（现金流量与资本成本估算）： </a:t>
+              <a:t>（2）阶段二（现金流量与资本成本估算）：</a:t>
             </a:r>
             <a:r>
               <a:rPr sz="1250" b="0">
@@ -15483,7 +15483,7 @@
                 <a:latin typeface="Times New Roman"/>
                 <a:ea typeface="宋体"/>
               </a:rPr>
-              <a:t>（3）阶段三（方案评价与财务择优）： </a:t>
+              <a:t>（3）阶段三（方案评价与财务择优）：</a:t>
             </a:r>
             <a:r>
               <a:rPr sz="1250" b="0">
@@ -15513,7 +15513,7 @@
                 <a:latin typeface="Times New Roman"/>
                 <a:ea typeface="宋体"/>
               </a:rPr>
-              <a:t>（4）阶段四（投后审计与再评价）： </a:t>
+              <a:t>（4）阶段四（投后审计与再评价）：</a:t>
             </a:r>
             <a:r>
               <a:rPr sz="1250" b="0">
@@ -15580,7 +15580,7 @@
                 <a:latin typeface="Times New Roman"/>
                 <a:ea typeface="宋体"/>
               </a:rPr>
-              <a:t>  ★ 核心要点：科学的资本预算流程是防范'拍脑袋'盲目上马重大项目、造成企业巨额资本毁灭的第一道防线。</a:t>
+              <a:t>★ 核心要点：科学的资本预算流程是防范'拍脑袋'盲目上马重大项目、造成企业巨额资本毁灭的第一道防线。</a:t>
             </a:r>
           </a:p>
         </p:txBody>
@@ -15987,7 +15987,7 @@
                 <a:latin typeface="Times New Roman"/>
                 <a:ea typeface="宋体"/>
               </a:rPr>
-              <a:t>  1. 单笔款项的复利终值与复利现值（例8-1/8-2）</a:t>
+              <a:t>1. 单笔款项的复利终值与复利现值（例8-1/8-2）</a:t>
             </a:r>
           </a:p>
         </p:txBody>
@@ -16030,7 +16030,7 @@
                 <a:latin typeface="Times New Roman"/>
                 <a:ea typeface="宋体"/>
               </a:rPr>
-              <a:t>（1）时间价值本质： </a:t>
+              <a:t>（1）时间价值本质：</a:t>
             </a:r>
             <a:r>
               <a:rPr sz="1250" b="0">
@@ -16060,7 +16060,7 @@
                 <a:latin typeface="Times New Roman"/>
                 <a:ea typeface="宋体"/>
               </a:rPr>
-              <a:t>（2）复利终值公式： </a:t>
+              <a:t>（2）复利终值公式：</a:t>
             </a:r>
             <a:r>
               <a:rPr sz="1250" b="0">
@@ -16070,7 +16070,7 @@
                 <a:latin typeface="Times New Roman"/>
                 <a:ea typeface="宋体"/>
               </a:rPr>
-              <a:t>FV_n = PV \cdot (1 + r)^n = PV \cdot FVIF_{r, n}</a:t>
+              <a:t>FVₙ = PV · (1 + r)ⁿ = PV · FVIF(r, n)</a:t>
             </a:r>
           </a:p>
           <a:p>
@@ -16090,7 +16090,7 @@
                 <a:latin typeface="Times New Roman"/>
                 <a:ea typeface="宋体"/>
               </a:rPr>
-              <a:t>（3）复利现值公式： </a:t>
+              <a:t>（3）复利现值公式：</a:t>
             </a:r>
             <a:r>
               <a:rPr sz="1250" b="0">
@@ -16100,7 +16100,7 @@
                 <a:latin typeface="Times New Roman"/>
                 <a:ea typeface="宋体"/>
               </a:rPr>
-              <a:t>PV = \frac{FV_n}{(1 + r)^n} = FV_n \cdot PVIF_{r, n} \quad (r: 贴现率, n: 期数)</a:t>
+              <a:t>PV = (FVₙ) / ((1 + r)ⁿ) = FVₙ · PVIF(r, n) (r: 贴现率, n: 期数)</a:t>
             </a:r>
           </a:p>
         </p:txBody>
@@ -16200,7 +16200,7 @@
                 <a:latin typeface="Times New Roman"/>
                 <a:ea typeface="宋体"/>
               </a:rPr>
-              <a:t>  2. 普通年金终值与年金现值公式（例8-3/8-4）</a:t>
+              <a:t>2. 普通年金终值与年金现值公式（例8-3/8-4）</a:t>
             </a:r>
           </a:p>
         </p:txBody>
@@ -16243,7 +16243,7 @@
                 <a:latin typeface="Times New Roman"/>
                 <a:ea typeface="宋体"/>
               </a:rPr>
-              <a:t>（1）普通年金（Annuity, A）： </a:t>
+              <a:t>（1）普通年金（Annuity, A）：</a:t>
             </a:r>
             <a:r>
               <a:rPr sz="1250" b="0">
@@ -16273,7 +16273,7 @@
                 <a:latin typeface="Times New Roman"/>
                 <a:ea typeface="宋体"/>
               </a:rPr>
-              <a:t>（2）年金现值公式： </a:t>
+              <a:t>（2）年金现值公式：</a:t>
             </a:r>
             <a:r>
               <a:rPr sz="1250" b="0">
@@ -16283,7 +16283,7 @@
                 <a:latin typeface="Times New Roman"/>
                 <a:ea typeface="宋体"/>
               </a:rPr>
-              <a:t>PVA_n = A \cdot \left[ \frac{1 - (1+r)^{-n}}{r} \right] = A \cdot PVIFA_{r, n}</a:t>
+              <a:t>PVAₙ = A · [ (1 - (1+r)⁻ⁿ) / r ] = A · PVIFA(r, n)</a:t>
             </a:r>
           </a:p>
           <a:p>
@@ -16303,7 +16303,7 @@
                 <a:latin typeface="Times New Roman"/>
                 <a:ea typeface="宋体"/>
               </a:rPr>
-              <a:t>（3）不规则现金流折现： </a:t>
+              <a:t>（3）不规则现金流折现：</a:t>
             </a:r>
             <a:r>
               <a:rPr sz="1250" b="0">
@@ -16313,7 +16313,7 @@
                 <a:latin typeface="Times New Roman"/>
                 <a:ea typeface="宋体"/>
               </a:rPr>
-              <a:t>逐期分别折现后求和：PV = \sum_{t=1}^n \frac{CF_t}{(1 + r)^t}。</a:t>
+              <a:t>逐期分别折现后求和：PV = ∑ⁿ (CFₜ) / ((1 + r)ᵗ)。</a:t>
             </a:r>
           </a:p>
         </p:txBody>
@@ -16370,7 +16370,7 @@
                 <a:latin typeface="Times New Roman"/>
                 <a:ea typeface="宋体"/>
               </a:rPr>
-              <a:t>  ★ 核心要点：货币时间价值是一切现代资产定价与投资可行性评估的数学底座。</a:t>
+              <a:t>★ 核心要点：货币时间价值是一切现代资产定价与投资可行性评估的数学底座。</a:t>
             </a:r>
           </a:p>
         </p:txBody>
@@ -16777,7 +16777,7 @@
                 <a:latin typeface="Times New Roman"/>
                 <a:ea typeface="宋体"/>
               </a:rPr>
-              <a:t>  1. 永续年金（Perpetuity）与优先股估值</a:t>
+              <a:t>1. 永续年金（Perpetuity）与优先股估值</a:t>
             </a:r>
           </a:p>
         </p:txBody>
@@ -16820,7 +16820,7 @@
                 <a:latin typeface="Times New Roman"/>
                 <a:ea typeface="宋体"/>
               </a:rPr>
-              <a:t>（1）概念界定： </a:t>
+              <a:t>（1）概念界定：</a:t>
             </a:r>
             <a:r>
               <a:rPr sz="1250" b="0">
@@ -16830,7 +16830,7 @@
                 <a:latin typeface="Times New Roman"/>
                 <a:ea typeface="宋体"/>
               </a:rPr>
-              <a:t>无限期等额收付的特种年金（期限 n \to \infty）。</a:t>
+              <a:t>无限期等额收付的特种年金（期限 n → ∞ ）。</a:t>
             </a:r>
           </a:p>
           <a:p>
@@ -16850,7 +16850,7 @@
                 <a:latin typeface="Times New Roman"/>
                 <a:ea typeface="宋体"/>
               </a:rPr>
-              <a:t>（2）极限折现公式： </a:t>
+              <a:t>（2）极限折现公式：</a:t>
             </a:r>
             <a:r>
               <a:rPr sz="1250" b="0">
@@ -16860,7 +16860,7 @@
                 <a:latin typeface="Times New Roman"/>
                 <a:ea typeface="宋体"/>
               </a:rPr>
-              <a:t>PV_{\infty} = \lim_{n \to \infty} A \left[ \frac{1 - (1+r)^{-n}}{r} \right] = \frac{A}{r}</a:t>
+              <a:t>PV_ ∞ = lim A [ (1 - (1+r)⁻ⁿ) / r ] = A / r</a:t>
             </a:r>
           </a:p>
           <a:p>
@@ -16880,7 +16880,7 @@
                 <a:latin typeface="Times New Roman"/>
                 <a:ea typeface="宋体"/>
               </a:rPr>
-              <a:t>（3）商业应用： </a:t>
+              <a:t>（3）商业应用：</a:t>
             </a:r>
             <a:r>
               <a:rPr sz="1250" b="0">
@@ -16990,7 +16990,7 @@
                 <a:latin typeface="Times New Roman"/>
                 <a:ea typeface="宋体"/>
               </a:rPr>
-              <a:t>  2. 递延年金（Deferred Annuity）与基建项目估值</a:t>
+              <a:t>2. 递延年金（Deferred Annuity）与基建项目估值</a:t>
             </a:r>
           </a:p>
         </p:txBody>
@@ -17033,7 +17033,7 @@
                 <a:latin typeface="Times New Roman"/>
                 <a:ea typeface="宋体"/>
               </a:rPr>
-              <a:t>（1）概念界定： </a:t>
+              <a:t>（1）概念界定：</a:t>
             </a:r>
             <a:r>
               <a:rPr sz="1250" b="0">
@@ -17063,7 +17063,7 @@
                 <a:latin typeface="Times New Roman"/>
                 <a:ea typeface="宋体"/>
               </a:rPr>
-              <a:t>（2）两次折现法： </a:t>
+              <a:t>（2）两次折现法：</a:t>
             </a:r>
             <a:r>
               <a:rPr sz="1250" b="0">
@@ -17073,7 +17073,7 @@
                 <a:latin typeface="Times New Roman"/>
                 <a:ea typeface="宋体"/>
               </a:rPr>
-              <a:t>PV = A \cdot PVIFA_{r, n} \cdot PVIF_{r, m}（先折现至建设期末，再折现至当前起点）。</a:t>
+              <a:t>PV = A · PVIFA(r, n) · PVIF_r, m（先折现至建设期末，再折现至当前起点）。</a:t>
             </a:r>
           </a:p>
           <a:p>
@@ -17093,7 +17093,7 @@
                 <a:latin typeface="Times New Roman"/>
                 <a:ea typeface="宋体"/>
               </a:rPr>
-              <a:t>（3）实战价值： </a:t>
+              <a:t>（3）实战价值：</a:t>
             </a:r>
             <a:r>
               <a:rPr sz="1250" b="0">
@@ -17160,7 +17160,7 @@
                 <a:latin typeface="Times New Roman"/>
                 <a:ea typeface="宋体"/>
               </a:rPr>
-              <a:t>  ★ 核心要点：掌握永续与递延年金折现，为跨周期基础设施与特许经营权估值提供坚实数理支撑。</a:t>
+              <a:t>★ 核心要点：掌握永续与递延年金折现，为跨周期基础设施与特许经营权估值提供坚实数理支撑。</a:t>
             </a:r>
           </a:p>
         </p:txBody>
@@ -17874,7 +17874,7 @@
                 <a:latin typeface="Times New Roman"/>
                 <a:ea typeface="宋体"/>
               </a:rPr>
-              <a:t>  1. 增量现金流与机会成本原则</a:t>
+              <a:t>1. 增量现金流与机会成本原则</a:t>
             </a:r>
           </a:p>
         </p:txBody>
@@ -17917,7 +17917,7 @@
                 <a:latin typeface="Times New Roman"/>
                 <a:ea typeface="宋体"/>
               </a:rPr>
-              <a:t>（1）增量现金流原则（Incremental Principle）： </a:t>
+              <a:t>（1）增量现金流原则（Incremental Principle）：</a:t>
             </a:r>
             <a:r>
               <a:rPr sz="1250" b="0">
@@ -17947,7 +17947,7 @@
                 <a:latin typeface="Times New Roman"/>
                 <a:ea typeface="宋体"/>
               </a:rPr>
-              <a:t>（2）必须计入全部机会成本（Opportunity Cost）： </a:t>
+              <a:t>（2）必须计入全部机会成本（Opportunity Cost）：</a:t>
             </a:r>
             <a:r>
               <a:rPr sz="1250" b="0">
@@ -18057,7 +18057,7 @@
                 <a:latin typeface="Times New Roman"/>
                 <a:ea typeface="宋体"/>
               </a:rPr>
-              <a:t>  2. 沉没成本与关联侵蚀效应原则</a:t>
+              <a:t>2. 沉没成本与关联侵蚀效应原则</a:t>
             </a:r>
           </a:p>
         </p:txBody>
@@ -18100,7 +18100,7 @@
                 <a:latin typeface="Times New Roman"/>
                 <a:ea typeface="宋体"/>
               </a:rPr>
-              <a:t>（3）坚决剔除沉没成本（Sunk Cost）： </a:t>
+              <a:t>（3）坚决剔除沉没成本（Sunk Cost）：</a:t>
             </a:r>
             <a:r>
               <a:rPr sz="1250" b="0">
@@ -18130,7 +18130,7 @@
                 <a:latin typeface="Times New Roman"/>
                 <a:ea typeface="宋体"/>
               </a:rPr>
-              <a:t>（4）必须考虑关联侵蚀与协同效应（Erosion/Synergy）： </a:t>
+              <a:t>（4）必须考虑关联侵蚀与协同效应（Erosion/Synergy）：</a:t>
             </a:r>
             <a:r>
               <a:rPr sz="1250" b="0">
@@ -18197,7 +18197,7 @@
                 <a:latin typeface="Times New Roman"/>
                 <a:ea typeface="宋体"/>
               </a:rPr>
-              <a:t>  ★ 核心要点：严守现金流估算四大原则，才能确保资本预算模型输入的底层数据客观公正。</a:t>
+              <a:t>★ 核心要点：严守现金流估算四大原则，才能确保资本预算模型输入的底层数据客观公正。</a:t>
             </a:r>
           </a:p>
         </p:txBody>
@@ -18604,7 +18604,7 @@
                 <a:latin typeface="Times New Roman"/>
                 <a:ea typeface="宋体"/>
               </a:rPr>
-              <a:t>  1. 投资项目现金流量构成的三个阶段</a:t>
+              <a:t>1. 投资项目现金流量构成的三个阶段</a:t>
             </a:r>
           </a:p>
         </p:txBody>
@@ -18647,7 +18647,7 @@
                 <a:latin typeface="Times New Roman"/>
                 <a:ea typeface="宋体"/>
               </a:rPr>
-              <a:t>（1）初始期现金流（t=0）： </a:t>
+              <a:t>（1）初始期现金流（t=0）：</a:t>
             </a:r>
             <a:r>
               <a:rPr sz="1250" b="0">
@@ -18677,7 +18677,7 @@
                 <a:latin typeface="Times New Roman"/>
                 <a:ea typeface="宋体"/>
               </a:rPr>
-              <a:t>（2）营业期净现金流（t=1~n）： </a:t>
+              <a:t>（2）营业期净现金流（t=1~n）：</a:t>
             </a:r>
             <a:r>
               <a:rPr sz="1250" b="0">
@@ -18707,7 +18707,7 @@
                 <a:latin typeface="Times New Roman"/>
                 <a:ea typeface="宋体"/>
               </a:rPr>
-              <a:t>（3）终结期现金流（t=n）： </a:t>
+              <a:t>（3）终结期现金流（t=n）：</a:t>
             </a:r>
             <a:r>
               <a:rPr sz="1250" b="0">
@@ -18817,7 +18817,7 @@
                 <a:latin typeface="Times New Roman"/>
                 <a:ea typeface="宋体"/>
               </a:rPr>
-              <a:t>  2. 营业期净现金流量（NCF）与折旧抵税盾</a:t>
+              <a:t>2. 营业期净现金流量（NCF）与折旧抵税盾</a:t>
             </a:r>
           </a:p>
         </p:txBody>
@@ -18860,7 +18860,7 @@
                 <a:latin typeface="Times New Roman"/>
                 <a:ea typeface="宋体"/>
               </a:rPr>
-              <a:t>（1）营业期净现金流公式推导： </a:t>
+              <a:t>（1）营业期净现金流公式推导：</a:t>
             </a:r>
             <a:r>
               <a:rPr sz="1250" b="0">
@@ -18870,7 +18870,7 @@
                 <a:latin typeface="Times New Roman"/>
                 <a:ea typeface="宋体"/>
               </a:rPr>
-              <a:t>NCF = \text{税后营业收入} - \text{税后付现成本} + \text{折旧抵税} = (S - C - Dep)(1 - T) + Dep</a:t>
+              <a:t>NCF = 税后营业收入 - 税后付现成本 + 折旧抵税 = (S - C - Dep)(1 - T) + Dep</a:t>
             </a:r>
           </a:p>
           <a:p>
@@ -18890,7 +18890,7 @@
                 <a:latin typeface="Times New Roman"/>
                 <a:ea typeface="宋体"/>
               </a:rPr>
-              <a:t>（2）整理后的折旧抵税黄金公式： </a:t>
+              <a:t>（2）整理后的折旧抵税黄金公式：</a:t>
             </a:r>
             <a:r>
               <a:rPr sz="1250" b="0">
@@ -18900,7 +18900,7 @@
                 <a:latin typeface="Times New Roman"/>
                 <a:ea typeface="宋体"/>
               </a:rPr>
-              <a:t>NCF = (S - C)(1 - T) + Dep \cdot T \quad (T: 企业所得税率)</a:t>
+              <a:t>NCF = (S - C)(1 - T) + Dep · T (T: 企业所得税率)</a:t>
             </a:r>
           </a:p>
           <a:p>
@@ -18920,7 +18920,7 @@
                 <a:latin typeface="Times New Roman"/>
                 <a:ea typeface="宋体"/>
               </a:rPr>
-              <a:t>（3）折旧抵税盾（Depreciation Tax Shield）： </a:t>
+              <a:t>（3）折旧抵税盾（Depreciation Tax Shield）：</a:t>
             </a:r>
             <a:r>
               <a:rPr sz="1250" b="0">
@@ -18930,7 +18930,7 @@
                 <a:latin typeface="Times New Roman"/>
                 <a:ea typeface="宋体"/>
               </a:rPr>
-              <a:t>折旧虽非实际现金支出，但作为成本可在税前扣除，产生 Dep \cdot T 的真金白银现金节税！</a:t>
+              <a:t>折旧虽非实际现金支出，但作为成本可在税前扣除，产生 Dep · T 的真金白银现金节税！</a:t>
             </a:r>
           </a:p>
         </p:txBody>
@@ -18987,7 +18987,7 @@
                 <a:latin typeface="Times New Roman"/>
                 <a:ea typeface="宋体"/>
               </a:rPr>
-              <a:t>  ★ 核心要点：现金流而非会计利润是资本预算的唯一血液，准确核算折旧抵税盾是投资估算的核心关键技能。</a:t>
+              <a:t>★ 核心要点：现金流而非会计利润是资本预算的唯一血液，准确核算折旧抵税盾是投资估算的核心关键技能。</a:t>
             </a:r>
           </a:p>
         </p:txBody>
